--- a/1С_Предприятие/практика 2.pptx
+++ b/1С_Предприятие/практика 2.pptx
@@ -295,7 +295,8 @@
           <a:p>
             <a:fld id="{1C60111E-6E25-4B74-9529-A4B884F69244}" type="datetimeFigureOut">
               <a:rPr lang="ru-RU" smtClean="0"/>
-              <a:t>27.02.2026</a:t>
+              <a:pPr/>
+              <a:t>22.03.2026</a:t>
             </a:fld>
             <a:endParaRPr lang="ru-RU"/>
           </a:p>
@@ -337,6 +338,7 @@
           <a:p>
             <a:fld id="{A28CD7D0-7822-4289-B10F-D163209084CF}" type="slidenum">
               <a:rPr lang="ru-RU" smtClean="0"/>
+              <a:pPr/>
               <a:t>‹#›</a:t>
             </a:fld>
             <a:endParaRPr lang="ru-RU"/>
@@ -460,7 +462,8 @@
           <a:p>
             <a:fld id="{1C60111E-6E25-4B74-9529-A4B884F69244}" type="datetimeFigureOut">
               <a:rPr lang="ru-RU" smtClean="0"/>
-              <a:t>27.02.2026</a:t>
+              <a:pPr/>
+              <a:t>22.03.2026</a:t>
             </a:fld>
             <a:endParaRPr lang="ru-RU"/>
           </a:p>
@@ -502,6 +505,7 @@
           <a:p>
             <a:fld id="{A28CD7D0-7822-4289-B10F-D163209084CF}" type="slidenum">
               <a:rPr lang="ru-RU" smtClean="0"/>
+              <a:pPr/>
               <a:t>‹#›</a:t>
             </a:fld>
             <a:endParaRPr lang="ru-RU"/>
@@ -635,7 +639,8 @@
           <a:p>
             <a:fld id="{1C60111E-6E25-4B74-9529-A4B884F69244}" type="datetimeFigureOut">
               <a:rPr lang="ru-RU" smtClean="0"/>
-              <a:t>27.02.2026</a:t>
+              <a:pPr/>
+              <a:t>22.03.2026</a:t>
             </a:fld>
             <a:endParaRPr lang="ru-RU"/>
           </a:p>
@@ -677,6 +682,7 @@
           <a:p>
             <a:fld id="{A28CD7D0-7822-4289-B10F-D163209084CF}" type="slidenum">
               <a:rPr lang="ru-RU" smtClean="0"/>
+              <a:pPr/>
               <a:t>‹#›</a:t>
             </a:fld>
             <a:endParaRPr lang="ru-RU"/>
@@ -800,7 +806,8 @@
           <a:p>
             <a:fld id="{1C60111E-6E25-4B74-9529-A4B884F69244}" type="datetimeFigureOut">
               <a:rPr lang="ru-RU" smtClean="0"/>
-              <a:t>27.02.2026</a:t>
+              <a:pPr/>
+              <a:t>22.03.2026</a:t>
             </a:fld>
             <a:endParaRPr lang="ru-RU"/>
           </a:p>
@@ -842,6 +849,7 @@
           <a:p>
             <a:fld id="{A28CD7D0-7822-4289-B10F-D163209084CF}" type="slidenum">
               <a:rPr lang="ru-RU" smtClean="0"/>
+              <a:pPr/>
               <a:t>‹#›</a:t>
             </a:fld>
             <a:endParaRPr lang="ru-RU"/>
@@ -1041,7 +1049,8 @@
           <a:p>
             <a:fld id="{1C60111E-6E25-4B74-9529-A4B884F69244}" type="datetimeFigureOut">
               <a:rPr lang="ru-RU" smtClean="0"/>
-              <a:t>27.02.2026</a:t>
+              <a:pPr/>
+              <a:t>22.03.2026</a:t>
             </a:fld>
             <a:endParaRPr lang="ru-RU"/>
           </a:p>
@@ -1083,6 +1092,7 @@
           <a:p>
             <a:fld id="{A28CD7D0-7822-4289-B10F-D163209084CF}" type="slidenum">
               <a:rPr lang="ru-RU" smtClean="0"/>
+              <a:pPr/>
               <a:t>‹#›</a:t>
             </a:fld>
             <a:endParaRPr lang="ru-RU"/>
@@ -1324,7 +1334,8 @@
           <a:p>
             <a:fld id="{1C60111E-6E25-4B74-9529-A4B884F69244}" type="datetimeFigureOut">
               <a:rPr lang="ru-RU" smtClean="0"/>
-              <a:t>27.02.2026</a:t>
+              <a:pPr/>
+              <a:t>22.03.2026</a:t>
             </a:fld>
             <a:endParaRPr lang="ru-RU"/>
           </a:p>
@@ -1366,6 +1377,7 @@
           <a:p>
             <a:fld id="{A28CD7D0-7822-4289-B10F-D163209084CF}" type="slidenum">
               <a:rPr lang="ru-RU" smtClean="0"/>
+              <a:pPr/>
               <a:t>‹#›</a:t>
             </a:fld>
             <a:endParaRPr lang="ru-RU"/>
@@ -1741,7 +1753,8 @@
           <a:p>
             <a:fld id="{1C60111E-6E25-4B74-9529-A4B884F69244}" type="datetimeFigureOut">
               <a:rPr lang="ru-RU" smtClean="0"/>
-              <a:t>27.02.2026</a:t>
+              <a:pPr/>
+              <a:t>22.03.2026</a:t>
             </a:fld>
             <a:endParaRPr lang="ru-RU"/>
           </a:p>
@@ -1783,6 +1796,7 @@
           <a:p>
             <a:fld id="{A28CD7D0-7822-4289-B10F-D163209084CF}" type="slidenum">
               <a:rPr lang="ru-RU" smtClean="0"/>
+              <a:pPr/>
               <a:t>‹#›</a:t>
             </a:fld>
             <a:endParaRPr lang="ru-RU"/>
@@ -1854,7 +1868,8 @@
           <a:p>
             <a:fld id="{1C60111E-6E25-4B74-9529-A4B884F69244}" type="datetimeFigureOut">
               <a:rPr lang="ru-RU" smtClean="0"/>
-              <a:t>27.02.2026</a:t>
+              <a:pPr/>
+              <a:t>22.03.2026</a:t>
             </a:fld>
             <a:endParaRPr lang="ru-RU"/>
           </a:p>
@@ -1896,6 +1911,7 @@
           <a:p>
             <a:fld id="{A28CD7D0-7822-4289-B10F-D163209084CF}" type="slidenum">
               <a:rPr lang="ru-RU" smtClean="0"/>
+              <a:pPr/>
               <a:t>‹#›</a:t>
             </a:fld>
             <a:endParaRPr lang="ru-RU"/>
@@ -1944,7 +1960,8 @@
           <a:p>
             <a:fld id="{1C60111E-6E25-4B74-9529-A4B884F69244}" type="datetimeFigureOut">
               <a:rPr lang="ru-RU" smtClean="0"/>
-              <a:t>27.02.2026</a:t>
+              <a:pPr/>
+              <a:t>22.03.2026</a:t>
             </a:fld>
             <a:endParaRPr lang="ru-RU"/>
           </a:p>
@@ -1986,6 +2003,7 @@
           <a:p>
             <a:fld id="{A28CD7D0-7822-4289-B10F-D163209084CF}" type="slidenum">
               <a:rPr lang="ru-RU" smtClean="0"/>
+              <a:pPr/>
               <a:t>‹#›</a:t>
             </a:fld>
             <a:endParaRPr lang="ru-RU"/>
@@ -2216,7 +2234,8 @@
           <a:p>
             <a:fld id="{1C60111E-6E25-4B74-9529-A4B884F69244}" type="datetimeFigureOut">
               <a:rPr lang="ru-RU" smtClean="0"/>
-              <a:t>27.02.2026</a:t>
+              <a:pPr/>
+              <a:t>22.03.2026</a:t>
             </a:fld>
             <a:endParaRPr lang="ru-RU"/>
           </a:p>
@@ -2258,6 +2277,7 @@
           <a:p>
             <a:fld id="{A28CD7D0-7822-4289-B10F-D163209084CF}" type="slidenum">
               <a:rPr lang="ru-RU" smtClean="0"/>
+              <a:pPr/>
               <a:t>‹#›</a:t>
             </a:fld>
             <a:endParaRPr lang="ru-RU"/>
@@ -2464,7 +2484,8 @@
           <a:p>
             <a:fld id="{1C60111E-6E25-4B74-9529-A4B884F69244}" type="datetimeFigureOut">
               <a:rPr lang="ru-RU" smtClean="0"/>
-              <a:t>27.02.2026</a:t>
+              <a:pPr/>
+              <a:t>22.03.2026</a:t>
             </a:fld>
             <a:endParaRPr lang="ru-RU"/>
           </a:p>
@@ -2506,6 +2527,7 @@
           <a:p>
             <a:fld id="{A28CD7D0-7822-4289-B10F-D163209084CF}" type="slidenum">
               <a:rPr lang="ru-RU" smtClean="0"/>
+              <a:pPr/>
               <a:t>‹#›</a:t>
             </a:fld>
             <a:endParaRPr lang="ru-RU"/>
@@ -2672,7 +2694,8 @@
           <a:p>
             <a:fld id="{1C60111E-6E25-4B74-9529-A4B884F69244}" type="datetimeFigureOut">
               <a:rPr lang="ru-RU" smtClean="0"/>
-              <a:t>27.02.2026</a:t>
+              <a:pPr/>
+              <a:t>22.03.2026</a:t>
             </a:fld>
             <a:endParaRPr lang="ru-RU"/>
           </a:p>
@@ -2750,6 +2773,7 @@
           <a:p>
             <a:fld id="{A28CD7D0-7822-4289-B10F-D163209084CF}" type="slidenum">
               <a:rPr lang="ru-RU" smtClean="0"/>
+              <a:pPr/>
               <a:t>‹#›</a:t>
             </a:fld>
             <a:endParaRPr lang="ru-RU"/>
@@ -3527,7 +3551,14 @@
                 <a:latin typeface="Times New Roman" pitchFamily="18" charset="0"/>
                 <a:cs typeface="Times New Roman" pitchFamily="18" charset="0"/>
               </a:rPr>
-              <a:t>Если сотрудник уже существует (не новый), код находит его в справочнике по коду</a:t>
+              <a:t>Если </a:t>
+            </a:r>
+            <a:r>
+              <a:rPr lang="ru-RU" dirty="0" smtClean="0">
+                <a:latin typeface="Times New Roman" pitchFamily="18" charset="0"/>
+                <a:cs typeface="Times New Roman" pitchFamily="18" charset="0"/>
+              </a:rPr>
+              <a:t>сотрудник уже существует (не новый), код находит его в справочнике по коду</a:t>
             </a:r>
             <a:endParaRPr lang="ru-RU" dirty="0">
               <a:latin typeface="Times New Roman" pitchFamily="18" charset="0"/>
@@ -3553,7 +3584,7 @@
         </p:blipFill>
         <p:spPr bwMode="auto">
           <a:xfrm>
-            <a:off x="2000232" y="6191250"/>
+            <a:off x="0" y="6191250"/>
             <a:ext cx="5324475" cy="666750"/>
           </a:xfrm>
           <a:prstGeom prst="rect">
@@ -3602,6 +3633,167 @@
           <a:effectLst/>
         </p:spPr>
       </p:pic>
+      <p:sp>
+        <p:nvSpPr>
+          <p:cNvPr id="5" name="Прямоугольник 4"/>
+          <p:cNvSpPr/>
+          <p:nvPr/>
+        </p:nvSpPr>
+        <p:spPr>
+          <a:xfrm>
+            <a:off x="6572264" y="5221444"/>
+            <a:ext cx="2571736" cy="707886"/>
+          </a:xfrm>
+          <a:prstGeom prst="rect">
+            <a:avLst/>
+          </a:prstGeom>
+          <a:solidFill>
+            <a:schemeClr val="bg2"/>
+          </a:solidFill>
+        </p:spPr>
+        <p:txBody>
+          <a:bodyPr wrap="square">
+            <a:spAutoFit/>
+          </a:bodyPr>
+          <a:lstStyle/>
+          <a:p>
+            <a:pPr algn="just"/>
+            <a:r>
+              <a:rPr lang="ru-RU" sz="1000" dirty="0" smtClean="0">
+                <a:latin typeface="Courier New" pitchFamily="49" charset="0"/>
+                <a:cs typeface="Courier New" pitchFamily="49" charset="0"/>
+              </a:rPr>
+              <a:t>Если </a:t>
+            </a:r>
+            <a:r>
+              <a:rPr lang="ru-RU" sz="1000" dirty="0" smtClean="0">
+                <a:latin typeface="Courier New" pitchFamily="49" charset="0"/>
+                <a:cs typeface="Courier New" pitchFamily="49" charset="0"/>
+              </a:rPr>
+              <a:t>Зарплата &lt; МРОТ Тогда</a:t>
+            </a:r>
+            <a:endParaRPr lang="en-US" sz="1000" dirty="0" smtClean="0">
+              <a:latin typeface="Courier New" pitchFamily="49" charset="0"/>
+              <a:cs typeface="Courier New" pitchFamily="49" charset="0"/>
+            </a:endParaRPr>
+          </a:p>
+          <a:p>
+            <a:pPr algn="just"/>
+            <a:r>
+              <a:rPr lang="ru-RU" sz="1000" dirty="0" smtClean="0">
+                <a:latin typeface="Courier New" pitchFamily="49" charset="0"/>
+                <a:cs typeface="Courier New" pitchFamily="49" charset="0"/>
+              </a:rPr>
+              <a:t>Сообщить(</a:t>
+            </a:r>
+            <a:r>
+              <a:rPr lang="ru-RU" sz="1000" dirty="0" smtClean="0">
+                <a:latin typeface="Courier New" pitchFamily="49" charset="0"/>
+                <a:cs typeface="Courier New" pitchFamily="49" charset="0"/>
+              </a:rPr>
+              <a:t>"</a:t>
+            </a:r>
+            <a:r>
+              <a:rPr lang="en-US" sz="1000" dirty="0" smtClean="0">
+                <a:latin typeface="Courier New" pitchFamily="49" charset="0"/>
+                <a:cs typeface="Courier New" pitchFamily="49" charset="0"/>
+              </a:rPr>
+              <a:t>...</a:t>
+            </a:r>
+            <a:r>
+              <a:rPr lang="ru-RU" sz="1000" dirty="0" smtClean="0">
+                <a:latin typeface="Courier New" pitchFamily="49" charset="0"/>
+                <a:cs typeface="Courier New" pitchFamily="49" charset="0"/>
+              </a:rPr>
+              <a:t>");</a:t>
+            </a:r>
+            <a:endParaRPr lang="ru-RU" sz="1000" dirty="0" smtClean="0">
+              <a:latin typeface="Courier New" pitchFamily="49" charset="0"/>
+              <a:cs typeface="Courier New" pitchFamily="49" charset="0"/>
+            </a:endParaRPr>
+          </a:p>
+          <a:p>
+            <a:pPr algn="just"/>
+            <a:r>
+              <a:rPr lang="ru-RU" sz="1000" dirty="0" smtClean="0">
+                <a:latin typeface="Courier New" pitchFamily="49" charset="0"/>
+                <a:cs typeface="Courier New" pitchFamily="49" charset="0"/>
+              </a:rPr>
+              <a:t>Отказ </a:t>
+            </a:r>
+            <a:r>
+              <a:rPr lang="ru-RU" sz="1000" dirty="0" smtClean="0">
+                <a:latin typeface="Courier New" pitchFamily="49" charset="0"/>
+                <a:cs typeface="Courier New" pitchFamily="49" charset="0"/>
+              </a:rPr>
+              <a:t>= Истина</a:t>
+            </a:r>
+            <a:r>
+              <a:rPr lang="ru-RU" sz="1000" dirty="0" smtClean="0">
+                <a:latin typeface="Courier New" pitchFamily="49" charset="0"/>
+                <a:cs typeface="Courier New" pitchFamily="49" charset="0"/>
+              </a:rPr>
+              <a:t>;</a:t>
+            </a:r>
+            <a:endParaRPr lang="en-US" sz="1000" dirty="0" smtClean="0">
+              <a:latin typeface="Courier New" pitchFamily="49" charset="0"/>
+              <a:cs typeface="Courier New" pitchFamily="49" charset="0"/>
+            </a:endParaRPr>
+          </a:p>
+          <a:p>
+            <a:pPr algn="just"/>
+            <a:r>
+              <a:rPr lang="ru-RU" sz="1000" dirty="0" smtClean="0">
+                <a:latin typeface="Courier New" pitchFamily="49" charset="0"/>
+                <a:cs typeface="Courier New" pitchFamily="49" charset="0"/>
+              </a:rPr>
+              <a:t>Возврат;</a:t>
+            </a:r>
+            <a:endParaRPr lang="ru-RU" sz="1000" dirty="0">
+              <a:latin typeface="Courier New" pitchFamily="49" charset="0"/>
+              <a:cs typeface="Courier New" pitchFamily="49" charset="0"/>
+            </a:endParaRPr>
+          </a:p>
+        </p:txBody>
+      </p:sp>
+      <p:cxnSp>
+        <p:nvCxnSpPr>
+          <p:cNvPr id="6" name="Прямая со стрелкой 5"/>
+          <p:cNvCxnSpPr>
+            <a:endCxn id="5" idx="1"/>
+          </p:cNvCxnSpPr>
+          <p:nvPr/>
+        </p:nvCxnSpPr>
+        <p:spPr>
+          <a:xfrm flipV="1">
+            <a:off x="4071934" y="5575387"/>
+            <a:ext cx="2500330" cy="74685"/>
+          </a:xfrm>
+          <a:prstGeom prst="straightConnector1">
+            <a:avLst/>
+          </a:prstGeom>
+          <a:ln>
+            <a:solidFill>
+              <a:srgbClr val="FF0000"/>
+            </a:solidFill>
+            <a:tailEnd type="arrow"/>
+          </a:ln>
+        </p:spPr>
+        <p:style>
+          <a:lnRef idx="1">
+            <a:schemeClr val="accent1"/>
+          </a:lnRef>
+          <a:fillRef idx="0">
+            <a:schemeClr val="accent1"/>
+          </a:fillRef>
+          <a:effectRef idx="0">
+            <a:schemeClr val="accent1"/>
+          </a:effectRef>
+          <a:fontRef idx="minor">
+            <a:schemeClr val="tx1"/>
+          </a:fontRef>
+        </p:style>
+      </p:cxnSp>
     </p:spTree>
   </p:cSld>
   <p:clrMapOvr>
@@ -4771,6 +4963,84 @@
           <a:effectLst/>
         </p:spPr>
       </p:pic>
+      <p:sp>
+        <p:nvSpPr>
+          <p:cNvPr id="7" name="Прямоугольник 6"/>
+          <p:cNvSpPr/>
+          <p:nvPr/>
+        </p:nvSpPr>
+        <p:spPr>
+          <a:xfrm>
+            <a:off x="3929058" y="5786454"/>
+            <a:ext cx="2869696" cy="307777"/>
+          </a:xfrm>
+          <a:prstGeom prst="rect">
+            <a:avLst/>
+          </a:prstGeom>
+        </p:spPr>
+        <p:txBody>
+          <a:bodyPr wrap="none">
+            <a:spAutoFit/>
+          </a:bodyPr>
+          <a:lstStyle/>
+          <a:p>
+            <a:r>
+              <a:rPr lang="ru-RU" sz="1400" dirty="0" err="1" smtClean="0">
+                <a:latin typeface="Courier New" pitchFamily="49" charset="0"/>
+                <a:cs typeface="Courier New" pitchFamily="49" charset="0"/>
+              </a:rPr>
+              <a:t>СотрудникОбъект.Зарплата</a:t>
+            </a:r>
+            <a:r>
+              <a:rPr lang="ru-RU" sz="1400" dirty="0" smtClean="0">
+                <a:latin typeface="Courier New" pitchFamily="49" charset="0"/>
+                <a:cs typeface="Courier New" pitchFamily="49" charset="0"/>
+              </a:rPr>
+              <a:t>;</a:t>
+            </a:r>
+            <a:endParaRPr lang="ru-RU" sz="1400" dirty="0">
+              <a:latin typeface="Courier New" pitchFamily="49" charset="0"/>
+              <a:cs typeface="Courier New" pitchFamily="49" charset="0"/>
+            </a:endParaRPr>
+          </a:p>
+        </p:txBody>
+      </p:sp>
+      <p:cxnSp>
+        <p:nvCxnSpPr>
+          <p:cNvPr id="9" name="Прямая со стрелкой 8"/>
+          <p:cNvCxnSpPr/>
+          <p:nvPr/>
+        </p:nvCxnSpPr>
+        <p:spPr>
+          <a:xfrm rot="10800000" flipV="1">
+            <a:off x="3357554" y="5929330"/>
+            <a:ext cx="571504" cy="142876"/>
+          </a:xfrm>
+          <a:prstGeom prst="straightConnector1">
+            <a:avLst/>
+          </a:prstGeom>
+          <a:ln>
+            <a:solidFill>
+              <a:srgbClr val="FF0000"/>
+            </a:solidFill>
+            <a:tailEnd type="arrow"/>
+          </a:ln>
+        </p:spPr>
+        <p:style>
+          <a:lnRef idx="1">
+            <a:schemeClr val="accent1"/>
+          </a:lnRef>
+          <a:fillRef idx="0">
+            <a:schemeClr val="accent1"/>
+          </a:fillRef>
+          <a:effectRef idx="0">
+            <a:schemeClr val="accent1"/>
+          </a:effectRef>
+          <a:fontRef idx="minor">
+            <a:schemeClr val="tx1"/>
+          </a:fontRef>
+        </p:style>
+      </p:cxnSp>
     </p:spTree>
   </p:cSld>
   <p:clrMapOvr>
